--- a/reports/BA_Predictive_Booking_Model.pptx
+++ b/reports/BA_Predictive_Booking_Model.pptx
@@ -1,17 +1,17 @@
 
 <file path=ppt/presentation.xml><?xml version="1.0" encoding="utf-8"?>
-<p:presentation xmlns:a="http://schemas.openxmlformats.org/drawingml/2006/main" xmlns:r="http://schemas.openxmlformats.org/officeDocument/2006/relationships" xmlns:p="http://schemas.openxmlformats.org/presentationml/2006/main" saveSubsetFonts="1" autoCompressPictures="0">
+<p:presentation xmlns:a="http://schemas.openxmlformats.org/drawingml/2006/main" xmlns:r="http://schemas.openxmlformats.org/officeDocument/2006/relationships" xmlns:p="http://schemas.openxmlformats.org/presentationml/2006/main" autoCompressPictures="0">
   <p:sldMasterIdLst>
     <p:sldMasterId id="2147483648" r:id="rId1"/>
   </p:sldMasterIdLst>
+  <p:notesMasterIdLst>
+    <p:notesMasterId r:id="rId4"/>
+  </p:notesMasterIdLst>
   <p:sldIdLst>
-    <p:sldId id="256" r:id="rId2"/>
-    <p:sldId id="257" r:id="rId3"/>
-    <p:sldId id="258" r:id="rId4"/>
+    <p:sldId id="256" r:id="rId3"/>
+    <p:sldId id="257" r:id="rId5"/>
+    <p:sldId id="258" r:id="rId6"/>
   </p:sldIdLst>
-  <p:notesMasterIdLst>
-    <p:notesMasterId r:id="rId5"/>
-  </p:notesMasterIdLst>
   <p:sldSz cx="9144000" cy="5143500"/>
   <p:notesSz cx="5143500" cy="9144000"/>
   <p:defaultTextStyle>
@@ -191,7 +191,6 @@
           <a:p>
             <a:fld id="{5282F153-3F37-0F45-9E97-73ACFA13230C}" type="datetimeFigureOut">
               <a:rPr lang="en-US"/>
-              <a:t>7/23/19</a:t>
             </a:fld>
             <a:endParaRPr lang="en-US"/>
           </a:p>
@@ -258,6 +257,7 @@
               <a:rPr lang="en-US"/>
               <a:t>Click to edit Master text styles</a:t>
             </a:r>
+            <a:endParaRPr lang="en-US"/>
           </a:p>
           <a:p>
             <a:pPr lvl="1"/>
@@ -265,6 +265,7 @@
               <a:rPr lang="en-US"/>
               <a:t>Second level</a:t>
             </a:r>
+            <a:endParaRPr lang="en-US"/>
           </a:p>
           <a:p>
             <a:pPr lvl="2"/>
@@ -272,6 +273,7 @@
               <a:rPr lang="en-US"/>
               <a:t>Third level</a:t>
             </a:r>
+            <a:endParaRPr lang="en-US"/>
           </a:p>
           <a:p>
             <a:pPr lvl="3"/>
@@ -279,6 +281,7 @@
               <a:rPr lang="en-US"/>
               <a:t>Fourth level</a:t>
             </a:r>
+            <a:endParaRPr lang="en-US"/>
           </a:p>
           <a:p>
             <a:pPr lvl="4"/>
@@ -286,6 +289,7 @@
               <a:rPr lang="en-US"/>
               <a:t>Fifth level</a:t>
             </a:r>
+            <a:endParaRPr lang="en-US"/>
           </a:p>
         </p:txBody>
       </p:sp>
@@ -349,18 +353,12 @@
           <a:p>
             <a:fld id="{CE5E9CC1-C706-0F49-92D6-E571CC5EEA8F}" type="slidenum">
               <a:rPr lang="en-US"/>
-              <a:t>‹#›</a:t>
             </a:fld>
             <a:endParaRPr lang="en-US"/>
           </a:p>
         </p:txBody>
       </p:sp>
     </p:spTree>
-    <p:extLst>
-      <p:ext uri="{BB962C8B-B14F-4D97-AF65-F5344CB8AC3E}">
-        <p14:creationId xmlns:p14="http://schemas.microsoft.com/office/powerpoint/2010/main" val="1024086991"/>
-      </p:ext>
-    </p:extLst>
   </p:cSld>
   <p:clrMap bg1="lt1" tx1="dk1" bg2="lt2" tx2="dk2" accent1="accent1" accent2="accent2" accent3="accent3" accent4="accent4" accent5="accent5" accent6="accent6" hlink="hlink" folHlink="folHlink"/>
   <p:notesStyle>
@@ -502,10 +500,6 @@
           <a:bodyPr/>
           <a:lstStyle/>
           <a:p>
-            <a:r>
-              <a:rPr lang="en-US" dirty="0"/>
-              <a:t/>
-            </a:r>
             <a:endParaRPr lang="en-US" dirty="0"/>
           </a:p>
         </p:txBody>
@@ -527,18 +521,12 @@
           <a:p>
             <a:fld id="{F7021451-1387-4CA6-816F-3879F97B5CBC}" type="slidenum">
               <a:rPr lang="en-US"/>
-              <a:t>1</a:t>
             </a:fld>
             <a:endParaRPr lang="en-US"/>
           </a:p>
         </p:txBody>
       </p:sp>
     </p:spTree>
-    <p:extLst>
-      <p:ext uri="{BB962C8B-B14F-4D97-AF65-F5344CB8AC3E}">
-        <p14:creationId xmlns:p14="http://schemas.microsoft.com/office/powerpoint/2010/main" val="1024086991"/>
-      </p:ext>
-    </p:extLst>
   </p:cSld>
   <p:clrMapOvr>
     <a:masterClrMapping/>
@@ -590,10 +578,6 @@
           <a:bodyPr/>
           <a:lstStyle/>
           <a:p>
-            <a:r>
-              <a:rPr lang="en-US" dirty="0"/>
-              <a:t/>
-            </a:r>
             <a:endParaRPr lang="en-US" dirty="0"/>
           </a:p>
         </p:txBody>
@@ -615,18 +599,12 @@
           <a:p>
             <a:fld id="{F7021451-1387-4CA6-816F-3879F97B5CBC}" type="slidenum">
               <a:rPr lang="en-US"/>
-              <a:t>2</a:t>
             </a:fld>
             <a:endParaRPr lang="en-US"/>
           </a:p>
         </p:txBody>
       </p:sp>
     </p:spTree>
-    <p:extLst>
-      <p:ext uri="{BB962C8B-B14F-4D97-AF65-F5344CB8AC3E}">
-        <p14:creationId xmlns:p14="http://schemas.microsoft.com/office/powerpoint/2010/main" val="1024086991"/>
-      </p:ext>
-    </p:extLst>
   </p:cSld>
   <p:clrMapOvr>
     <a:masterClrMapping/>
@@ -678,10 +656,6 @@
           <a:bodyPr/>
           <a:lstStyle/>
           <a:p>
-            <a:r>
-              <a:rPr lang="en-US" dirty="0"/>
-              <a:t/>
-            </a:r>
             <a:endParaRPr lang="en-US" dirty="0"/>
           </a:p>
         </p:txBody>
@@ -703,18 +677,12 @@
           <a:p>
             <a:fld id="{F7021451-1387-4CA6-816F-3879F97B5CBC}" type="slidenum">
               <a:rPr lang="en-US"/>
-              <a:t>3</a:t>
             </a:fld>
             <a:endParaRPr lang="en-US"/>
           </a:p>
         </p:txBody>
       </p:sp>
     </p:spTree>
-    <p:extLst>
-      <p:ext uri="{BB962C8B-B14F-4D97-AF65-F5344CB8AC3E}">
-        <p14:creationId xmlns:p14="http://schemas.microsoft.com/office/powerpoint/2010/main" val="1024086991"/>
-      </p:ext>
-    </p:extLst>
   </p:cSld>
   <p:clrMapOvr>
     <a:masterClrMapping/>
@@ -755,6 +723,11 @@
 <file path=ppt/slideMasters/slideMaster1.xml><?xml version="1.0" encoding="utf-8"?>
 <p:sldMaster xmlns:a="http://schemas.openxmlformats.org/drawingml/2006/main" xmlns:r="http://schemas.openxmlformats.org/officeDocument/2006/relationships" xmlns:p="http://schemas.openxmlformats.org/presentationml/2006/main">
   <p:cSld>
+    <p:bg>
+      <p:bgRef idx="1001">
+        <a:schemeClr val="bg1"/>
+      </p:bgRef>
+    </p:bg>
     <p:spTree>
       <p:nvGrpSpPr>
         <p:cNvPr id="1" name=""/>
@@ -798,7 +771,7 @@
         <a:spcBef>
           <a:spcPct val="20000"/>
         </a:spcBef>
-        <a:buFont typeface="Arial" pitchFamily="34" charset="0"/>
+        <a:buFont typeface="Arial" panose="02080604020202020204" pitchFamily="34" charset="0"/>
         <a:buChar char="•"/>
         <a:defRPr sz="3200" kern="1200">
           <a:solidFill>
@@ -813,7 +786,7 @@
         <a:spcBef>
           <a:spcPct val="20000"/>
         </a:spcBef>
-        <a:buFont typeface="Arial" pitchFamily="34" charset="0"/>
+        <a:buFont typeface="Arial" panose="02080604020202020204" pitchFamily="34" charset="0"/>
         <a:buChar char="–"/>
         <a:defRPr sz="2800" kern="1200">
           <a:solidFill>
@@ -828,7 +801,7 @@
         <a:spcBef>
           <a:spcPct val="20000"/>
         </a:spcBef>
-        <a:buFont typeface="Arial" pitchFamily="34" charset="0"/>
+        <a:buFont typeface="Arial" panose="02080604020202020204" pitchFamily="34" charset="0"/>
         <a:buChar char="•"/>
         <a:defRPr sz="2400" kern="1200">
           <a:solidFill>
@@ -843,7 +816,7 @@
         <a:spcBef>
           <a:spcPct val="20000"/>
         </a:spcBef>
-        <a:buFont typeface="Arial" pitchFamily="34" charset="0"/>
+        <a:buFont typeface="Arial" panose="02080604020202020204" pitchFamily="34" charset="0"/>
         <a:buChar char="–"/>
         <a:defRPr sz="2000" kern="1200">
           <a:solidFill>
@@ -858,7 +831,7 @@
         <a:spcBef>
           <a:spcPct val="20000"/>
         </a:spcBef>
-        <a:buFont typeface="Arial" pitchFamily="34" charset="0"/>
+        <a:buFont typeface="Arial" panose="02080604020202020204" pitchFamily="34" charset="0"/>
         <a:buChar char="»"/>
         <a:defRPr sz="2000" kern="1200">
           <a:solidFill>
@@ -873,7 +846,7 @@
         <a:spcBef>
           <a:spcPct val="20000"/>
         </a:spcBef>
-        <a:buFont typeface="Arial" pitchFamily="34" charset="0"/>
+        <a:buFont typeface="Arial" panose="02080604020202020204" pitchFamily="34" charset="0"/>
         <a:buChar char="•"/>
         <a:defRPr sz="2000" kern="1200">
           <a:solidFill>
@@ -888,7 +861,7 @@
         <a:spcBef>
           <a:spcPct val="20000"/>
         </a:spcBef>
-        <a:buFont typeface="Arial" pitchFamily="34" charset="0"/>
+        <a:buFont typeface="Arial" panose="02080604020202020204" pitchFamily="34" charset="0"/>
         <a:buChar char="•"/>
         <a:defRPr sz="2000" kern="1200">
           <a:solidFill>
@@ -903,7 +876,7 @@
         <a:spcBef>
           <a:spcPct val="20000"/>
         </a:spcBef>
-        <a:buFont typeface="Arial" pitchFamily="34" charset="0"/>
+        <a:buFont typeface="Arial" panose="02080604020202020204" pitchFamily="34" charset="0"/>
         <a:buChar char="•"/>
         <a:defRPr sz="2000" kern="1200">
           <a:solidFill>
@@ -918,7 +891,7 @@
         <a:spcBef>
           <a:spcPct val="20000"/>
         </a:spcBef>
-        <a:buFont typeface="Arial" pitchFamily="34" charset="0"/>
+        <a:buFont typeface="Arial" panose="02080604020202020204" pitchFamily="34" charset="0"/>
         <a:buChar char="•"/>
         <a:defRPr sz="2000" kern="1200">
           <a:solidFill>
@@ -1031,12 +1004,13 @@
 
 <file path=ppt/slides/slide1.xml><?xml version="1.0" encoding="utf-8"?>
 <p:sld xmlns:a="http://schemas.openxmlformats.org/drawingml/2006/main" xmlns:r="http://schemas.openxmlformats.org/officeDocument/2006/relationships" xmlns:p="http://schemas.openxmlformats.org/presentationml/2006/main">
-  <p:cSld name="Slide 1">
+  <p:cSld>
     <p:bg>
       <p:bgPr>
         <a:solidFill>
           <a:srgbClr val="0B1F78"/>
         </a:solidFill>
+        <a:effectLst/>
       </p:bgPr>
     </p:bg>
     <p:spTree>
@@ -1070,7 +1044,6 @@
           <a:solidFill>
             <a:srgbClr val="CC0000"/>
           </a:solidFill>
-          <a:ln/>
         </p:spPr>
       </p:sp>
       <p:sp>
@@ -1090,7 +1063,6 @@
           <a:solidFill>
             <a:srgbClr val="D4A017"/>
           </a:solidFill>
-          <a:ln/>
         </p:spPr>
       </p:sp>
       <p:sp>
@@ -1110,7 +1082,6 @@
           <a:solidFill>
             <a:srgbClr val="D4A017"/>
           </a:solidFill>
-          <a:ln/>
         </p:spPr>
       </p:sp>
       <p:sp>
@@ -1153,13 +1124,12 @@
             <a:avLst/>
           </a:prstGeom>
           <a:noFill/>
-          <a:ln/>
         </p:spPr>
         <p:txBody>
           <a:bodyPr wrap="square" rtlCol="0" anchor="ctr"/>
           <a:lstStyle/>
           <a:p>
-            <a:pPr algn="ctr" indent="0" marL="0">
+            <a:pPr marL="0" indent="0" algn="ctr">
               <a:buNone/>
             </a:pPr>
             <a:r>
@@ -1192,13 +1162,12 @@
             <a:avLst/>
           </a:prstGeom>
           <a:noFill/>
-          <a:ln/>
         </p:spPr>
         <p:txBody>
           <a:bodyPr wrap="square" rtlCol="0" anchor="ctr"/>
           <a:lstStyle/>
           <a:p>
-            <a:pPr algn="ctr" indent="0" marL="0">
+            <a:pPr marL="0" indent="0" algn="ctr">
               <a:buNone/>
             </a:pPr>
             <a:r>
@@ -1215,7 +1184,7 @@
             <a:endParaRPr lang="en-US" sz="4200" dirty="0"/>
           </a:p>
           <a:p>
-            <a:pPr algn="ctr" indent="0" marL="0">
+            <a:pPr marL="0" indent="0" algn="ctr">
               <a:buNone/>
             </a:pPr>
             <a:r>
@@ -1248,13 +1217,12 @@
             <a:avLst/>
           </a:prstGeom>
           <a:noFill/>
-          <a:ln/>
         </p:spPr>
         <p:txBody>
           <a:bodyPr wrap="square" rtlCol="0" anchor="ctr"/>
           <a:lstStyle/>
           <a:p>
-            <a:pPr algn="ctr" indent="0" marL="0">
+            <a:pPr marL="0" indent="0" algn="ctr">
               <a:buNone/>
             </a:pPr>
             <a:r>
@@ -1287,13 +1255,12 @@
             <a:avLst/>
           </a:prstGeom>
           <a:noFill/>
-          <a:ln/>
         </p:spPr>
         <p:txBody>
           <a:bodyPr wrap="square" rtlCol="0" anchor="ctr"/>
           <a:lstStyle/>
           <a:p>
-            <a:pPr algn="ctr" indent="0" marL="0">
+            <a:pPr marL="0" indent="0" algn="ctr">
               <a:buNone/>
             </a:pPr>
             <a:r>
@@ -1305,34 +1272,17 @@
                 <a:ea typeface="Calibri" pitchFamily="34" charset="-122"/>
                 <a:cs typeface="Calibri" pitchFamily="34" charset="-120"/>
               </a:rPr>
-              <a:t>British Airways Data Science  |  </a:t>
-            </a:r>
-            <a:pPr algn="ctr" indent="0" marL="0">
-              <a:buNone/>
-            </a:pPr>
+              <a:t>British Airways Data Science  |  Customer Acquisition Strategy  |  </a:t>
+            </a:r>
             <a:r>
               <a:rPr lang="en-US" sz="1300" dirty="0">
                 <a:solidFill>
-                  <a:srgbClr val="FFFFFF"/>
+                  <a:srgbClr val="D4A017"/>
                 </a:solidFill>
                 <a:latin typeface="Calibri" pitchFamily="34" charset="0"/>
                 <a:ea typeface="Calibri" pitchFamily="34" charset="-122"/>
                 <a:cs typeface="Calibri" pitchFamily="34" charset="-120"/>
               </a:rPr>
-              <a:t>Customer Acquisition Strategy  |  </a:t>
-            </a:r>
-            <a:pPr algn="ctr" indent="0" marL="0">
-              <a:buNone/>
-            </a:pPr>
-            <a:r>
-              <a:rPr lang="en-US" sz="1300" dirty="0">
-                <a:solidFill>
-                  <a:srgbClr val="D4A017"/>
-                </a:solidFill>
-                <a:latin typeface="Calibri" pitchFamily="34" charset="0"/>
-                <a:ea typeface="Calibri" pitchFamily="34" charset="-122"/>
-                <a:cs typeface="Calibri" pitchFamily="34" charset="-120"/>
-              </a:rPr>
               <a:t>Random Forest Classifier</a:t>
             </a:r>
             <a:endParaRPr lang="en-US" sz="1300" dirty="0"/>
@@ -1354,13 +1304,12 @@
             <a:avLst/>
           </a:prstGeom>
           <a:noFill/>
-          <a:ln/>
         </p:spPr>
         <p:txBody>
           <a:bodyPr wrap="square" rtlCol="0" anchor="ctr"/>
           <a:lstStyle/>
           <a:p>
-            <a:pPr algn="ctr" indent="0" marL="0">
+            <a:pPr marL="0" indent="0" algn="ctr">
               <a:buNone/>
             </a:pPr>
             <a:r>
@@ -1388,12 +1337,13 @@
 
 <file path=ppt/slides/slide2.xml><?xml version="1.0" encoding="utf-8"?>
 <p:sld xmlns:a="http://schemas.openxmlformats.org/drawingml/2006/main" xmlns:r="http://schemas.openxmlformats.org/officeDocument/2006/relationships" xmlns:p="http://schemas.openxmlformats.org/presentationml/2006/main">
-  <p:cSld name="Slide 2">
+  <p:cSld>
     <p:bg>
       <p:bgPr>
         <a:solidFill>
           <a:srgbClr val="F5F6FA"/>
         </a:solidFill>
+        <a:effectLst/>
       </p:bgPr>
     </p:bg>
     <p:spTree>
@@ -1427,7 +1377,6 @@
           <a:solidFill>
             <a:srgbClr val="0B1F78"/>
           </a:solidFill>
-          <a:ln/>
         </p:spPr>
       </p:sp>
       <p:sp>
@@ -1447,7 +1396,6 @@
           <a:solidFill>
             <a:srgbClr val="D4A017"/>
           </a:solidFill>
-          <a:ln/>
         </p:spPr>
       </p:sp>
       <p:sp>
@@ -1465,13 +1413,12 @@
             <a:avLst/>
           </a:prstGeom>
           <a:noFill/>
-          <a:ln/>
         </p:spPr>
         <p:txBody>
           <a:bodyPr wrap="square" rtlCol="0" anchor="ctr"/>
           <a:lstStyle/>
           <a:p>
-            <a:pPr indent="0" marL="0">
+            <a:pPr marL="0" indent="0">
               <a:buNone/>
             </a:pPr>
             <a:r>
@@ -1506,7 +1453,6 @@
           <a:solidFill>
             <a:srgbClr val="D4A017"/>
           </a:solidFill>
-          <a:ln/>
         </p:spPr>
       </p:sp>
       <p:sp>
@@ -1524,13 +1470,12 @@
             <a:avLst/>
           </a:prstGeom>
           <a:noFill/>
-          <a:ln/>
         </p:spPr>
         <p:txBody>
           <a:bodyPr wrap="square" rtlCol="0" anchor="ctr"/>
           <a:lstStyle/>
           <a:p>
-            <a:pPr algn="ctr" indent="0" marL="0">
+            <a:pPr marL="0" indent="0" algn="ctr">
               <a:buNone/>
             </a:pPr>
             <a:r>
@@ -1565,9 +1510,8 @@
           <a:solidFill>
             <a:srgbClr val="FFFFFF"/>
           </a:solidFill>
-          <a:ln/>
           <a:effectLst>
-            <a:outerShdw sx="100000" sy="100000" kx="0" ky="0" algn="bl" rotWithShape="0" blurRad="50800" dist="25400" dir="8100000">
+            <a:outerShdw blurRad="50800" dist="25400" dir="8100000" algn="bl" rotWithShape="0">
               <a:srgbClr val="000000">
                 <a:alpha val="10000"/>
               </a:srgbClr>
@@ -1592,7 +1536,6 @@
           <a:solidFill>
             <a:srgbClr val="0B1F78"/>
           </a:solidFill>
-          <a:ln/>
         </p:spPr>
       </p:sp>
       <p:sp>
@@ -1610,13 +1553,12 @@
             <a:avLst/>
           </a:prstGeom>
           <a:noFill/>
-          <a:ln/>
         </p:spPr>
         <p:txBody>
           <a:bodyPr wrap="square" lIns="0" tIns="0" rIns="0" bIns="0" rtlCol="0" anchor="ctr"/>
           <a:lstStyle/>
           <a:p>
-            <a:pPr algn="ctr" indent="0" marL="0">
+            <a:pPr marL="0" indent="0" algn="ctr">
               <a:buNone/>
             </a:pPr>
             <a:r>
@@ -1649,13 +1591,12 @@
             <a:avLst/>
           </a:prstGeom>
           <a:noFill/>
-          <a:ln/>
         </p:spPr>
         <p:txBody>
           <a:bodyPr wrap="square" rtlCol="0" anchor="ctr"/>
           <a:lstStyle/>
           <a:p>
-            <a:pPr algn="ctr" indent="0" marL="0">
+            <a:pPr marL="0" indent="0" algn="ctr">
               <a:buNone/>
             </a:pPr>
             <a:r>
@@ -1688,13 +1629,12 @@
             <a:avLst/>
           </a:prstGeom>
           <a:noFill/>
-          <a:ln/>
         </p:spPr>
         <p:txBody>
           <a:bodyPr wrap="square" rtlCol="0" anchor="ctr"/>
           <a:lstStyle/>
           <a:p>
-            <a:pPr algn="ctr" indent="0" marL="0">
+            <a:pPr marL="0" indent="0" algn="ctr">
               <a:buNone/>
             </a:pPr>
             <a:r>
@@ -1729,9 +1669,8 @@
           <a:solidFill>
             <a:srgbClr val="FFFFFF"/>
           </a:solidFill>
-          <a:ln/>
           <a:effectLst>
-            <a:outerShdw sx="100000" sy="100000" kx="0" ky="0" algn="bl" rotWithShape="0" blurRad="50800" dist="25400" dir="8100000">
+            <a:outerShdw blurRad="50800" dist="25400" dir="8100000" algn="bl" rotWithShape="0">
               <a:srgbClr val="000000">
                 <a:alpha val="10000"/>
               </a:srgbClr>
@@ -1756,7 +1695,6 @@
           <a:solidFill>
             <a:srgbClr val="CC0000"/>
           </a:solidFill>
-          <a:ln/>
         </p:spPr>
       </p:sp>
       <p:sp>
@@ -1774,13 +1712,12 @@
             <a:avLst/>
           </a:prstGeom>
           <a:noFill/>
-          <a:ln/>
         </p:spPr>
         <p:txBody>
           <a:bodyPr wrap="square" lIns="0" tIns="0" rIns="0" bIns="0" rtlCol="0" anchor="ctr"/>
           <a:lstStyle/>
           <a:p>
-            <a:pPr algn="ctr" indent="0" marL="0">
+            <a:pPr marL="0" indent="0" algn="ctr">
               <a:buNone/>
             </a:pPr>
             <a:r>
@@ -1813,13 +1750,12 @@
             <a:avLst/>
           </a:prstGeom>
           <a:noFill/>
-          <a:ln/>
         </p:spPr>
         <p:txBody>
           <a:bodyPr wrap="square" rtlCol="0" anchor="ctr"/>
           <a:lstStyle/>
           <a:p>
-            <a:pPr algn="ctr" indent="0" marL="0">
+            <a:pPr marL="0" indent="0" algn="ctr">
               <a:buNone/>
             </a:pPr>
             <a:r>
@@ -1852,13 +1788,12 @@
             <a:avLst/>
           </a:prstGeom>
           <a:noFill/>
-          <a:ln/>
         </p:spPr>
         <p:txBody>
           <a:bodyPr wrap="square" rtlCol="0" anchor="ctr"/>
           <a:lstStyle/>
           <a:p>
-            <a:pPr algn="ctr" indent="0" marL="0">
+            <a:pPr marL="0" indent="0" algn="ctr">
               <a:buNone/>
             </a:pPr>
             <a:r>
@@ -1893,9 +1828,8 @@
           <a:solidFill>
             <a:srgbClr val="FFFFFF"/>
           </a:solidFill>
-          <a:ln/>
           <a:effectLst>
-            <a:outerShdw sx="100000" sy="100000" kx="0" ky="0" algn="bl" rotWithShape="0" blurRad="50800" dist="25400" dir="8100000">
+            <a:outerShdw blurRad="50800" dist="25400" dir="8100000" algn="bl" rotWithShape="0">
               <a:srgbClr val="000000">
                 <a:alpha val="10000"/>
               </a:srgbClr>
@@ -1920,7 +1854,6 @@
           <a:solidFill>
             <a:srgbClr val="0D6E3A"/>
           </a:solidFill>
-          <a:ln/>
         </p:spPr>
       </p:sp>
       <p:sp>
@@ -1938,13 +1871,12 @@
             <a:avLst/>
           </a:prstGeom>
           <a:noFill/>
-          <a:ln/>
         </p:spPr>
         <p:txBody>
           <a:bodyPr wrap="square" lIns="0" tIns="0" rIns="0" bIns="0" rtlCol="0" anchor="ctr"/>
           <a:lstStyle/>
           <a:p>
-            <a:pPr algn="ctr" indent="0" marL="0">
+            <a:pPr marL="0" indent="0" algn="ctr">
               <a:buNone/>
             </a:pPr>
             <a:r>
@@ -1977,13 +1909,12 @@
             <a:avLst/>
           </a:prstGeom>
           <a:noFill/>
-          <a:ln/>
         </p:spPr>
         <p:txBody>
           <a:bodyPr wrap="square" rtlCol="0" anchor="ctr"/>
           <a:lstStyle/>
           <a:p>
-            <a:pPr algn="ctr" indent="0" marL="0">
+            <a:pPr marL="0" indent="0" algn="ctr">
               <a:buNone/>
             </a:pPr>
             <a:r>
@@ -2016,13 +1947,12 @@
             <a:avLst/>
           </a:prstGeom>
           <a:noFill/>
-          <a:ln/>
         </p:spPr>
         <p:txBody>
           <a:bodyPr wrap="square" rtlCol="0" anchor="ctr"/>
           <a:lstStyle/>
           <a:p>
-            <a:pPr algn="ctr" indent="0" marL="0">
+            <a:pPr marL="0" indent="0" algn="ctr">
               <a:buNone/>
             </a:pPr>
             <a:r>
@@ -2057,9 +1987,8 @@
           <a:solidFill>
             <a:srgbClr val="FFFFFF"/>
           </a:solidFill>
-          <a:ln/>
           <a:effectLst>
-            <a:outerShdw sx="100000" sy="100000" kx="0" ky="0" algn="bl" rotWithShape="0" blurRad="50800" dist="25400" dir="8100000">
+            <a:outerShdw blurRad="50800" dist="25400" dir="8100000" algn="bl" rotWithShape="0">
               <a:srgbClr val="000000">
                 <a:alpha val="10000"/>
               </a:srgbClr>
@@ -2084,7 +2013,6 @@
           <a:solidFill>
             <a:srgbClr val="D4A017"/>
           </a:solidFill>
-          <a:ln/>
         </p:spPr>
       </p:sp>
       <p:sp>
@@ -2102,13 +2030,12 @@
             <a:avLst/>
           </a:prstGeom>
           <a:noFill/>
-          <a:ln/>
         </p:spPr>
         <p:txBody>
           <a:bodyPr wrap="square" lIns="0" tIns="0" rIns="0" bIns="0" rtlCol="0" anchor="ctr"/>
           <a:lstStyle/>
           <a:p>
-            <a:pPr algn="ctr" indent="0" marL="0">
+            <a:pPr marL="0" indent="0" algn="ctr">
               <a:buNone/>
             </a:pPr>
             <a:r>
@@ -2141,13 +2068,12 @@
             <a:avLst/>
           </a:prstGeom>
           <a:noFill/>
-          <a:ln/>
         </p:spPr>
         <p:txBody>
           <a:bodyPr wrap="square" rtlCol="0" anchor="ctr"/>
           <a:lstStyle/>
           <a:p>
-            <a:pPr algn="ctr" indent="0" marL="0">
+            <a:pPr marL="0" indent="0" algn="ctr">
               <a:buNone/>
             </a:pPr>
             <a:r>
@@ -2180,13 +2106,12 @@
             <a:avLst/>
           </a:prstGeom>
           <a:noFill/>
-          <a:ln/>
         </p:spPr>
         <p:txBody>
           <a:bodyPr wrap="square" rtlCol="0" anchor="ctr"/>
           <a:lstStyle/>
           <a:p>
-            <a:pPr algn="ctr" indent="0" marL="0">
+            <a:pPr marL="0" indent="0" algn="ctr">
               <a:buNone/>
             </a:pPr>
             <a:r>
@@ -2221,9 +2146,8 @@
           <a:solidFill>
             <a:srgbClr val="FFFFFF"/>
           </a:solidFill>
-          <a:ln/>
           <a:effectLst>
-            <a:outerShdw sx="100000" sy="100000" kx="0" ky="0" algn="bl" rotWithShape="0" blurRad="50800" dist="25400" dir="8100000">
+            <a:outerShdw blurRad="50800" dist="25400" dir="8100000" algn="bl" rotWithShape="0">
               <a:srgbClr val="000000">
                 <a:alpha val="10000"/>
               </a:srgbClr>
@@ -2248,7 +2172,6 @@
           <a:solidFill>
             <a:srgbClr val="5C3D8F"/>
           </a:solidFill>
-          <a:ln/>
         </p:spPr>
       </p:sp>
       <p:sp>
@@ -2266,13 +2189,12 @@
             <a:avLst/>
           </a:prstGeom>
           <a:noFill/>
-          <a:ln/>
         </p:spPr>
         <p:txBody>
           <a:bodyPr wrap="square" lIns="0" tIns="0" rIns="0" bIns="0" rtlCol="0" anchor="ctr"/>
           <a:lstStyle/>
           <a:p>
-            <a:pPr algn="ctr" indent="0" marL="0">
+            <a:pPr marL="0" indent="0" algn="ctr">
               <a:buNone/>
             </a:pPr>
             <a:r>
@@ -2305,13 +2227,12 @@
             <a:avLst/>
           </a:prstGeom>
           <a:noFill/>
-          <a:ln/>
         </p:spPr>
         <p:txBody>
           <a:bodyPr wrap="square" rtlCol="0" anchor="ctr"/>
           <a:lstStyle/>
           <a:p>
-            <a:pPr algn="ctr" indent="0" marL="0">
+            <a:pPr marL="0" indent="0" algn="ctr">
               <a:buNone/>
             </a:pPr>
             <a:r>
@@ -2344,13 +2265,12 @@
             <a:avLst/>
           </a:prstGeom>
           <a:noFill/>
-          <a:ln/>
         </p:spPr>
         <p:txBody>
           <a:bodyPr wrap="square" rtlCol="0" anchor="ctr"/>
           <a:lstStyle/>
           <a:p>
-            <a:pPr algn="ctr" indent="0" marL="0">
+            <a:pPr marL="0" indent="0" algn="ctr">
               <a:buNone/>
             </a:pPr>
             <a:r>
@@ -2385,9 +2305,8 @@
           <a:solidFill>
             <a:srgbClr val="FFFFFF"/>
           </a:solidFill>
-          <a:ln/>
           <a:effectLst>
-            <a:outerShdw sx="100000" sy="100000" kx="0" ky="0" algn="bl" rotWithShape="0" blurRad="50800" dist="25400" dir="8100000">
+            <a:outerShdw blurRad="50800" dist="25400" dir="8100000" algn="bl" rotWithShape="0">
               <a:srgbClr val="000000">
                 <a:alpha val="10000"/>
               </a:srgbClr>
@@ -2412,7 +2331,6 @@
           <a:solidFill>
             <a:srgbClr val="0B1F78"/>
           </a:solidFill>
-          <a:ln/>
         </p:spPr>
       </p:sp>
       <p:sp>
@@ -2430,13 +2348,12 @@
             <a:avLst/>
           </a:prstGeom>
           <a:noFill/>
-          <a:ln/>
         </p:spPr>
         <p:txBody>
           <a:bodyPr wrap="square" lIns="0" tIns="0" rIns="0" bIns="0" rtlCol="0" anchor="ctr"/>
           <a:lstStyle/>
           <a:p>
-            <a:pPr algn="ctr" indent="0" marL="0">
+            <a:pPr marL="0" indent="0" algn="ctr">
               <a:buNone/>
             </a:pPr>
             <a:r>
@@ -2456,7 +2373,7 @@
       </p:sp>
       <p:pic>
         <p:nvPicPr>
-          <p:cNvPr id="35" name="Image 0" descr="preencoded.png">    </p:cNvPr>
+          <p:cNvPr id="35" name="Image 0" descr="preencoded.png"/>
           <p:cNvPicPr>
             <a:picLocks noChangeAspect="1"/>
           </p:cNvPicPr>
@@ -2495,9 +2412,8 @@
           <a:solidFill>
             <a:srgbClr val="FFFFFF"/>
           </a:solidFill>
-          <a:ln/>
           <a:effectLst>
-            <a:outerShdw sx="100000" sy="100000" kx="0" ky="0" algn="bl" rotWithShape="0" blurRad="50800" dist="25400" dir="8100000">
+            <a:outerShdw blurRad="50800" dist="25400" dir="8100000" algn="bl" rotWithShape="0">
               <a:srgbClr val="000000">
                 <a:alpha val="10000"/>
               </a:srgbClr>
@@ -2522,7 +2438,6 @@
           <a:solidFill>
             <a:srgbClr val="CC0000"/>
           </a:solidFill>
-          <a:ln/>
         </p:spPr>
       </p:sp>
       <p:sp>
@@ -2540,13 +2455,12 @@
             <a:avLst/>
           </a:prstGeom>
           <a:noFill/>
-          <a:ln/>
         </p:spPr>
         <p:txBody>
           <a:bodyPr wrap="square" lIns="0" tIns="0" rIns="0" bIns="0" rtlCol="0" anchor="ctr"/>
           <a:lstStyle/>
           <a:p>
-            <a:pPr algn="ctr" indent="0" marL="0">
+            <a:pPr marL="0" indent="0" algn="ctr">
               <a:buNone/>
             </a:pPr>
             <a:r>
@@ -2566,7 +2480,7 @@
       </p:sp>
       <p:pic>
         <p:nvPicPr>
-          <p:cNvPr id="39" name="Image 1" descr="preencoded.png">    </p:cNvPr>
+          <p:cNvPr id="39" name="Image 1" descr="preencoded.png"/>
           <p:cNvPicPr>
             <a:picLocks noChangeAspect="1"/>
           </p:cNvPicPr>
@@ -2605,7 +2519,6 @@
           <a:solidFill>
             <a:srgbClr val="0B1F78"/>
           </a:solidFill>
-          <a:ln/>
         </p:spPr>
       </p:sp>
       <p:sp>
@@ -2623,13 +2536,12 @@
             <a:avLst/>
           </a:prstGeom>
           <a:noFill/>
-          <a:ln/>
         </p:spPr>
         <p:txBody>
           <a:bodyPr wrap="square" rtlCol="0" anchor="ctr"/>
           <a:lstStyle/>
           <a:p>
-            <a:pPr algn="ctr" indent="0" marL="0">
+            <a:pPr marL="0" indent="0" algn="ctr">
               <a:buNone/>
             </a:pPr>
             <a:r>
@@ -2657,12 +2569,13 @@
 
 <file path=ppt/slides/slide3.xml><?xml version="1.0" encoding="utf-8"?>
 <p:sld xmlns:a="http://schemas.openxmlformats.org/drawingml/2006/main" xmlns:r="http://schemas.openxmlformats.org/officeDocument/2006/relationships" xmlns:p="http://schemas.openxmlformats.org/presentationml/2006/main">
-  <p:cSld name="Slide 3">
+  <p:cSld>
     <p:bg>
       <p:bgPr>
         <a:solidFill>
           <a:srgbClr val="F5F6FA"/>
         </a:solidFill>
+        <a:effectLst/>
       </p:bgPr>
     </p:bg>
     <p:spTree>
@@ -2696,7 +2609,6 @@
           <a:solidFill>
             <a:srgbClr val="0B1F78"/>
           </a:solidFill>
-          <a:ln/>
         </p:spPr>
       </p:sp>
       <p:sp>
@@ -2716,7 +2628,6 @@
           <a:solidFill>
             <a:srgbClr val="D4A017"/>
           </a:solidFill>
-          <a:ln/>
         </p:spPr>
       </p:sp>
       <p:sp>
@@ -2734,13 +2645,12 @@
             <a:avLst/>
           </a:prstGeom>
           <a:noFill/>
-          <a:ln/>
         </p:spPr>
         <p:txBody>
           <a:bodyPr wrap="square" rtlCol="0" anchor="ctr"/>
           <a:lstStyle/>
           <a:p>
-            <a:pPr indent="0" marL="0">
+            <a:pPr marL="0" indent="0">
               <a:buNone/>
             </a:pPr>
             <a:r>
@@ -2775,7 +2685,6 @@
           <a:solidFill>
             <a:srgbClr val="D4A017"/>
           </a:solidFill>
-          <a:ln/>
         </p:spPr>
       </p:sp>
       <p:sp>
@@ -2793,13 +2702,12 @@
             <a:avLst/>
           </a:prstGeom>
           <a:noFill/>
-          <a:ln/>
         </p:spPr>
         <p:txBody>
           <a:bodyPr wrap="square" rtlCol="0" anchor="ctr"/>
           <a:lstStyle/>
           <a:p>
-            <a:pPr algn="ctr" indent="0" marL="0">
+            <a:pPr marL="0" indent="0" algn="ctr">
               <a:buNone/>
             </a:pPr>
             <a:r>
@@ -2834,9 +2742,8 @@
           <a:solidFill>
             <a:srgbClr val="FFFFFF"/>
           </a:solidFill>
-          <a:ln/>
           <a:effectLst>
-            <a:outerShdw sx="100000" sy="100000" kx="0" ky="0" algn="bl" rotWithShape="0" blurRad="50800" dist="25400" dir="8100000">
+            <a:outerShdw blurRad="50800" dist="25400" dir="8100000" algn="bl" rotWithShape="0">
               <a:srgbClr val="000000">
                 <a:alpha val="10000"/>
               </a:srgbClr>
@@ -2861,7 +2768,6 @@
           <a:solidFill>
             <a:srgbClr val="0B1F78"/>
           </a:solidFill>
-          <a:ln/>
         </p:spPr>
       </p:sp>
       <p:sp>
@@ -2879,13 +2785,12 @@
             <a:avLst/>
           </a:prstGeom>
           <a:noFill/>
-          <a:ln/>
         </p:spPr>
         <p:txBody>
           <a:bodyPr wrap="square" lIns="0" tIns="0" rIns="0" bIns="0" rtlCol="0" anchor="ctr"/>
           <a:lstStyle/>
           <a:p>
-            <a:pPr algn="ctr" indent="0" marL="0">
+            <a:pPr marL="0" indent="0" algn="ctr">
               <a:buNone/>
             </a:pPr>
             <a:r>
@@ -2945,7 +2850,6 @@
           <a:solidFill>
             <a:srgbClr val="CC0000"/>
           </a:solidFill>
-          <a:ln/>
         </p:spPr>
       </p:sp>
       <p:sp>
@@ -2963,13 +2867,12 @@
             <a:avLst/>
           </a:prstGeom>
           <a:noFill/>
-          <a:ln/>
         </p:spPr>
         <p:txBody>
           <a:bodyPr wrap="square" lIns="0" tIns="0" rIns="0" bIns="0" rtlCol="0" anchor="ctr"/>
           <a:lstStyle/>
           <a:p>
-            <a:pPr indent="0" marL="0">
+            <a:pPr marL="0" indent="0">
               <a:buNone/>
             </a:pPr>
             <a:r>
@@ -3002,13 +2905,12 @@
             <a:avLst/>
           </a:prstGeom>
           <a:noFill/>
-          <a:ln/>
         </p:spPr>
         <p:txBody>
           <a:bodyPr wrap="square" lIns="0" tIns="0" rIns="0" bIns="0" rtlCol="0" anchor="ctr"/>
           <a:lstStyle/>
           <a:p>
-            <a:pPr indent="0" marL="0">
+            <a:pPr marL="0" indent="0">
               <a:buNone/>
             </a:pPr>
             <a:r>
@@ -3068,7 +2970,6 @@
           <a:solidFill>
             <a:srgbClr val="CC0000"/>
           </a:solidFill>
-          <a:ln/>
         </p:spPr>
       </p:sp>
       <p:sp>
@@ -3086,13 +2987,12 @@
             <a:avLst/>
           </a:prstGeom>
           <a:noFill/>
-          <a:ln/>
         </p:spPr>
         <p:txBody>
           <a:bodyPr wrap="square" lIns="0" tIns="0" rIns="0" bIns="0" rtlCol="0" anchor="ctr"/>
           <a:lstStyle/>
           <a:p>
-            <a:pPr indent="0" marL="0">
+            <a:pPr marL="0" indent="0">
               <a:buNone/>
             </a:pPr>
             <a:r>
@@ -3125,13 +3025,12 @@
             <a:avLst/>
           </a:prstGeom>
           <a:noFill/>
-          <a:ln/>
         </p:spPr>
         <p:txBody>
           <a:bodyPr wrap="square" lIns="0" tIns="0" rIns="0" bIns="0" rtlCol="0" anchor="ctr"/>
           <a:lstStyle/>
           <a:p>
-            <a:pPr indent="0" marL="0">
+            <a:pPr marL="0" indent="0">
               <a:buNone/>
             </a:pPr>
             <a:r>
@@ -3191,7 +3090,6 @@
           <a:solidFill>
             <a:srgbClr val="CC0000"/>
           </a:solidFill>
-          <a:ln/>
         </p:spPr>
       </p:sp>
       <p:sp>
@@ -3209,13 +3107,12 @@
             <a:avLst/>
           </a:prstGeom>
           <a:noFill/>
-          <a:ln/>
         </p:spPr>
         <p:txBody>
           <a:bodyPr wrap="square" lIns="0" tIns="0" rIns="0" bIns="0" rtlCol="0" anchor="ctr"/>
           <a:lstStyle/>
           <a:p>
-            <a:pPr indent="0" marL="0">
+            <a:pPr marL="0" indent="0">
               <a:buNone/>
             </a:pPr>
             <a:r>
@@ -3227,7 +3124,29 @@
                 <a:ea typeface="Calibri" pitchFamily="34" charset="-122"/>
                 <a:cs typeface="Calibri" pitchFamily="34" charset="-120"/>
               </a:rPr>
-              <a:t>🎒 Add-On Services</a:t>
+              <a:t>🎒</a:t>
+            </a:r>
+            <a:r>
+              <a:rPr lang="" altLang="en-US" sz="1000" b="1" dirty="0">
+                <a:solidFill>
+                  <a:srgbClr val="0B1F78"/>
+                </a:solidFill>
+                <a:latin typeface="Calibri" pitchFamily="34" charset="0"/>
+                <a:ea typeface="Calibri" pitchFamily="34" charset="-122"/>
+                <a:cs typeface="Calibri" pitchFamily="34" charset="-120"/>
+              </a:rPr>
+              <a:t>A</a:t>
+            </a:r>
+            <a:r>
+              <a:rPr lang="en-US" sz="1000" b="1" dirty="0">
+                <a:solidFill>
+                  <a:srgbClr val="0B1F78"/>
+                </a:solidFill>
+                <a:latin typeface="Calibri" pitchFamily="34" charset="0"/>
+                <a:ea typeface="Calibri" pitchFamily="34" charset="-122"/>
+                <a:cs typeface="Calibri" pitchFamily="34" charset="-120"/>
+              </a:rPr>
+              <a:t>dd-On Services</a:t>
             </a:r>
             <a:endParaRPr lang="en-US" sz="1000" dirty="0"/>
           </a:p>
@@ -3248,13 +3167,12 @@
             <a:avLst/>
           </a:prstGeom>
           <a:noFill/>
-          <a:ln/>
         </p:spPr>
         <p:txBody>
           <a:bodyPr wrap="square" lIns="0" tIns="0" rIns="0" bIns="0" rtlCol="0" anchor="ctr"/>
           <a:lstStyle/>
           <a:p>
-            <a:pPr indent="0" marL="0">
+            <a:pPr marL="0" indent="0">
               <a:buNone/>
             </a:pPr>
             <a:r>
@@ -3314,7 +3232,6 @@
           <a:solidFill>
             <a:srgbClr val="CC0000"/>
           </a:solidFill>
-          <a:ln/>
         </p:spPr>
       </p:sp>
       <p:sp>
@@ -3332,13 +3249,12 @@
             <a:avLst/>
           </a:prstGeom>
           <a:noFill/>
-          <a:ln/>
         </p:spPr>
         <p:txBody>
           <a:bodyPr wrap="square" lIns="0" tIns="0" rIns="0" bIns="0" rtlCol="0" anchor="ctr"/>
           <a:lstStyle/>
           <a:p>
-            <a:pPr indent="0" marL="0">
+            <a:pPr marL="0" indent="0">
               <a:buNone/>
             </a:pPr>
             <a:r>
@@ -3371,13 +3287,12 @@
             <a:avLst/>
           </a:prstGeom>
           <a:noFill/>
-          <a:ln/>
         </p:spPr>
         <p:txBody>
           <a:bodyPr wrap="square" lIns="0" tIns="0" rIns="0" bIns="0" rtlCol="0" anchor="ctr"/>
           <a:lstStyle/>
           <a:p>
-            <a:pPr indent="0" marL="0">
+            <a:pPr marL="0" indent="0">
               <a:buNone/>
             </a:pPr>
             <a:r>
@@ -3412,9 +3327,8 @@
           <a:solidFill>
             <a:srgbClr val="FFFFFF"/>
           </a:solidFill>
-          <a:ln/>
           <a:effectLst>
-            <a:outerShdw sx="100000" sy="100000" kx="0" ky="0" algn="bl" rotWithShape="0" blurRad="50800" dist="25400" dir="8100000">
+            <a:outerShdw blurRad="50800" dist="25400" dir="8100000" algn="bl" rotWithShape="0">
               <a:srgbClr val="000000">
                 <a:alpha val="10000"/>
               </a:srgbClr>
@@ -3439,7 +3353,6 @@
           <a:solidFill>
             <a:srgbClr val="CC0000"/>
           </a:solidFill>
-          <a:ln/>
         </p:spPr>
       </p:sp>
       <p:sp>
@@ -3457,13 +3370,12 @@
             <a:avLst/>
           </a:prstGeom>
           <a:noFill/>
-          <a:ln/>
         </p:spPr>
         <p:txBody>
           <a:bodyPr wrap="square" lIns="0" tIns="0" rIns="0" bIns="0" rtlCol="0" anchor="ctr"/>
           <a:lstStyle/>
           <a:p>
-            <a:pPr algn="ctr" indent="0" marL="0">
+            <a:pPr marL="0" indent="0" algn="ctr">
               <a:buNone/>
             </a:pPr>
             <a:r>
@@ -3523,7 +3435,6 @@
           <a:solidFill>
             <a:srgbClr val="CC0000"/>
           </a:solidFill>
-          <a:ln/>
         </p:spPr>
       </p:sp>
       <p:sp>
@@ -3541,13 +3452,12 @@
             <a:avLst/>
           </a:prstGeom>
           <a:noFill/>
-          <a:ln/>
         </p:spPr>
         <p:txBody>
           <a:bodyPr wrap="square" lIns="0" tIns="0" rIns="0" bIns="0" rtlCol="0" anchor="ctr"/>
           <a:lstStyle/>
           <a:p>
-            <a:pPr algn="ctr" indent="0" marL="0">
+            <a:pPr marL="0" indent="0" algn="ctr">
               <a:buNone/>
             </a:pPr>
             <a:r>
@@ -3580,13 +3490,12 @@
             <a:avLst/>
           </a:prstGeom>
           <a:noFill/>
-          <a:ln/>
         </p:spPr>
         <p:txBody>
           <a:bodyPr wrap="square" lIns="0" tIns="0" rIns="0" bIns="0" rtlCol="0" anchor="ctr"/>
           <a:lstStyle/>
           <a:p>
-            <a:pPr indent="0" marL="0">
+            <a:pPr marL="0" indent="0">
               <a:buNone/>
             </a:pPr>
             <a:r>
@@ -3619,13 +3528,12 @@
             <a:avLst/>
           </a:prstGeom>
           <a:noFill/>
-          <a:ln/>
         </p:spPr>
         <p:txBody>
           <a:bodyPr wrap="square" lIns="0" tIns="0" rIns="0" bIns="0" rtlCol="0" anchor="ctr"/>
           <a:lstStyle/>
           <a:p>
-            <a:pPr indent="0" marL="0">
+            <a:pPr marL="0" indent="0">
               <a:buNone/>
             </a:pPr>
             <a:r>
@@ -3685,7 +3593,6 @@
           <a:solidFill>
             <a:srgbClr val="CC0000"/>
           </a:solidFill>
-          <a:ln/>
         </p:spPr>
       </p:sp>
       <p:sp>
@@ -3703,13 +3610,12 @@
             <a:avLst/>
           </a:prstGeom>
           <a:noFill/>
-          <a:ln/>
         </p:spPr>
         <p:txBody>
           <a:bodyPr wrap="square" lIns="0" tIns="0" rIns="0" bIns="0" rtlCol="0" anchor="ctr"/>
           <a:lstStyle/>
           <a:p>
-            <a:pPr algn="ctr" indent="0" marL="0">
+            <a:pPr marL="0" indent="0" algn="ctr">
               <a:buNone/>
             </a:pPr>
             <a:r>
@@ -3742,13 +3648,12 @@
             <a:avLst/>
           </a:prstGeom>
           <a:noFill/>
-          <a:ln/>
         </p:spPr>
         <p:txBody>
           <a:bodyPr wrap="square" lIns="0" tIns="0" rIns="0" bIns="0" rtlCol="0" anchor="ctr"/>
           <a:lstStyle/>
           <a:p>
-            <a:pPr indent="0" marL="0">
+            <a:pPr marL="0" indent="0">
               <a:buNone/>
             </a:pPr>
             <a:r>
@@ -3781,13 +3686,12 @@
             <a:avLst/>
           </a:prstGeom>
           <a:noFill/>
-          <a:ln/>
         </p:spPr>
         <p:txBody>
           <a:bodyPr wrap="square" lIns="0" tIns="0" rIns="0" bIns="0" rtlCol="0" anchor="ctr"/>
           <a:lstStyle/>
           <a:p>
-            <a:pPr indent="0" marL="0">
+            <a:pPr marL="0" indent="0">
               <a:buNone/>
             </a:pPr>
             <a:r>
@@ -3847,7 +3751,6 @@
           <a:solidFill>
             <a:srgbClr val="CC0000"/>
           </a:solidFill>
-          <a:ln/>
         </p:spPr>
       </p:sp>
       <p:sp>
@@ -3865,13 +3768,12 @@
             <a:avLst/>
           </a:prstGeom>
           <a:noFill/>
-          <a:ln/>
         </p:spPr>
         <p:txBody>
           <a:bodyPr wrap="square" lIns="0" tIns="0" rIns="0" bIns="0" rtlCol="0" anchor="ctr"/>
           <a:lstStyle/>
           <a:p>
-            <a:pPr algn="ctr" indent="0" marL="0">
+            <a:pPr marL="0" indent="0" algn="ctr">
               <a:buNone/>
             </a:pPr>
             <a:r>
@@ -3904,13 +3806,12 @@
             <a:avLst/>
           </a:prstGeom>
           <a:noFill/>
-          <a:ln/>
         </p:spPr>
         <p:txBody>
           <a:bodyPr wrap="square" lIns="0" tIns="0" rIns="0" bIns="0" rtlCol="0" anchor="ctr"/>
           <a:lstStyle/>
           <a:p>
-            <a:pPr indent="0" marL="0">
+            <a:pPr marL="0" indent="0">
               <a:buNone/>
             </a:pPr>
             <a:r>
@@ -3943,13 +3844,12 @@
             <a:avLst/>
           </a:prstGeom>
           <a:noFill/>
-          <a:ln/>
         </p:spPr>
         <p:txBody>
           <a:bodyPr wrap="square" lIns="0" tIns="0" rIns="0" bIns="0" rtlCol="0" anchor="ctr"/>
           <a:lstStyle/>
           <a:p>
-            <a:pPr indent="0" marL="0">
+            <a:pPr marL="0" indent="0">
               <a:buNone/>
             </a:pPr>
             <a:r>
@@ -4009,7 +3909,6 @@
           <a:solidFill>
             <a:srgbClr val="CC0000"/>
           </a:solidFill>
-          <a:ln/>
         </p:spPr>
       </p:sp>
       <p:sp>
@@ -4027,13 +3926,12 @@
             <a:avLst/>
           </a:prstGeom>
           <a:noFill/>
-          <a:ln/>
         </p:spPr>
         <p:txBody>
           <a:bodyPr wrap="square" lIns="0" tIns="0" rIns="0" bIns="0" rtlCol="0" anchor="ctr"/>
           <a:lstStyle/>
           <a:p>
-            <a:pPr algn="ctr" indent="0" marL="0">
+            <a:pPr marL="0" indent="0" algn="ctr">
               <a:buNone/>
             </a:pPr>
             <a:r>
@@ -4066,13 +3964,12 @@
             <a:avLst/>
           </a:prstGeom>
           <a:noFill/>
-          <a:ln/>
         </p:spPr>
         <p:txBody>
           <a:bodyPr wrap="square" lIns="0" tIns="0" rIns="0" bIns="0" rtlCol="0" anchor="ctr"/>
           <a:lstStyle/>
           <a:p>
-            <a:pPr indent="0" marL="0">
+            <a:pPr marL="0" indent="0">
               <a:buNone/>
             </a:pPr>
             <a:r>
@@ -4105,13 +4002,12 @@
             <a:avLst/>
           </a:prstGeom>
           <a:noFill/>
-          <a:ln/>
         </p:spPr>
         <p:txBody>
           <a:bodyPr wrap="square" lIns="0" tIns="0" rIns="0" bIns="0" rtlCol="0" anchor="ctr"/>
           <a:lstStyle/>
           <a:p>
-            <a:pPr indent="0" marL="0">
+            <a:pPr marL="0" indent="0">
               <a:buNone/>
             </a:pPr>
             <a:r>
@@ -4146,7 +4042,6 @@
           <a:solidFill>
             <a:srgbClr val="0B1F78"/>
           </a:solidFill>
-          <a:ln/>
         </p:spPr>
       </p:sp>
       <p:sp>
@@ -4164,13 +4059,12 @@
             <a:avLst/>
           </a:prstGeom>
           <a:noFill/>
-          <a:ln/>
         </p:spPr>
         <p:txBody>
           <a:bodyPr wrap="square" rtlCol="0" anchor="ctr"/>
           <a:lstStyle/>
           <a:p>
-            <a:pPr algn="ctr" indent="0" marL="0">
+            <a:pPr marL="0" indent="0" algn="ctr">
               <a:buNone/>
             </a:pPr>
             <a:r>
@@ -4239,7 +4133,7 @@
     </a:clrScheme>
     <a:fontScheme name="Office">
       <a:majorFont>
-        <a:latin typeface="Calibri Light" panose="020F0302020204030204"/>
+        <a:latin typeface="Calibri Light"/>
         <a:ea typeface=""/>
         <a:cs typeface=""/>
         <a:font script="Jpan" typeface="游ゴシック Light"/>
@@ -4272,26 +4166,9 @@
         <a:font script="Viet" typeface="Times New Roman"/>
         <a:font script="Uigh" typeface="Microsoft Uighur"/>
         <a:font script="Geor" typeface="Sylfaen"/>
-        <a:font script="Armn" typeface="Arial"/>
-        <a:font script="Bugi" typeface="Leelawadee UI"/>
-        <a:font script="Bopo" typeface="Microsoft JhengHei"/>
-        <a:font script="Java" typeface="Javanese Text"/>
-        <a:font script="Lisu" typeface="Segoe UI"/>
-        <a:font script="Mymr" typeface="Myanmar Text"/>
-        <a:font script="Nkoo" typeface="Ebrima"/>
-        <a:font script="Olck" typeface="Nirmala UI"/>
-        <a:font script="Osma" typeface="Ebrima"/>
-        <a:font script="Phag" typeface="Phagspa"/>
-        <a:font script="Syrn" typeface="Estrangelo Edessa"/>
-        <a:font script="Syrj" typeface="Estrangelo Edessa"/>
-        <a:font script="Syre" typeface="Estrangelo Edessa"/>
-        <a:font script="Sora" typeface="Nirmala UI"/>
-        <a:font script="Tale" typeface="Microsoft Tai Le"/>
-        <a:font script="Talu" typeface="Microsoft New Tai Lue"/>
-        <a:font script="Tfng" typeface="Ebrima"/>
       </a:majorFont>
       <a:minorFont>
-        <a:latin typeface="Calibri" panose="020F0502020204030204"/>
+        <a:latin typeface="Calibri"/>
         <a:ea typeface=""/>
         <a:cs typeface=""/>
         <a:font script="Jpan" typeface="游ゴシック"/>
@@ -4324,23 +4201,6 @@
         <a:font script="Viet" typeface="Arial"/>
         <a:font script="Uigh" typeface="Microsoft Uighur"/>
         <a:font script="Geor" typeface="Sylfaen"/>
-        <a:font script="Armn" typeface="Arial"/>
-        <a:font script="Bugi" typeface="Leelawadee UI"/>
-        <a:font script="Bopo" typeface="Microsoft JhengHei"/>
-        <a:font script="Java" typeface="Javanese Text"/>
-        <a:font script="Lisu" typeface="Segoe UI"/>
-        <a:font script="Mymr" typeface="Myanmar Text"/>
-        <a:font script="Nkoo" typeface="Ebrima"/>
-        <a:font script="Olck" typeface="Nirmala UI"/>
-        <a:font script="Osma" typeface="Ebrima"/>
-        <a:font script="Phag" typeface="Phagspa"/>
-        <a:font script="Syrn" typeface="Estrangelo Edessa"/>
-        <a:font script="Syrj" typeface="Estrangelo Edessa"/>
-        <a:font script="Syre" typeface="Estrangelo Edessa"/>
-        <a:font script="Sora" typeface="Nirmala UI"/>
-        <a:font script="Tale" typeface="Microsoft Tai Le"/>
-        <a:font script="Talu" typeface="Microsoft New Tai Lue"/>
-        <a:font script="Tfng" typeface="Ebrima"/>
       </a:minorFont>
     </a:fontScheme>
     <a:fmtScheme name="Office">
@@ -4481,8 +4341,265 @@
       </a:bgFillStyleLst>
     </a:fmtScheme>
   </a:themeElements>
-  <a:objectDefaults/>
-  <a:extraClrSchemeLst/>
+  <a:extLst>
+    <a:ext uri="{05A4C25C-085E-4340-85A3-A5531E510DB2}">
+      <thm15:themeFamily xmlns:thm15="http://schemas.microsoft.com/office/thememl/2012/main" name="Office Theme" id="{62F939B6-93AF-4DB8-9C6B-D6C7DFDC589F}" vid="{4A3C46E8-61CC-4603-A589-7422A47A8E4A}"/>
+    </a:ext>
+  </a:extLst>
+</a:theme>
+</file>
+
+<file path=ppt/theme/theme2.xml><?xml version="1.0" encoding="utf-8"?>
+<a:theme xmlns:a="http://schemas.openxmlformats.org/drawingml/2006/main" name="Office Theme">
+  <a:themeElements>
+    <a:clrScheme name="Office">
+      <a:dk1>
+        <a:sysClr val="windowText" lastClr="000000"/>
+      </a:dk1>
+      <a:lt1>
+        <a:sysClr val="window" lastClr="FFFFFF"/>
+      </a:lt1>
+      <a:dk2>
+        <a:srgbClr val="44546A"/>
+      </a:dk2>
+      <a:lt2>
+        <a:srgbClr val="E7E6E6"/>
+      </a:lt2>
+      <a:accent1>
+        <a:srgbClr val="4472C4"/>
+      </a:accent1>
+      <a:accent2>
+        <a:srgbClr val="ED7D31"/>
+      </a:accent2>
+      <a:accent3>
+        <a:srgbClr val="A5A5A5"/>
+      </a:accent3>
+      <a:accent4>
+        <a:srgbClr val="FFC000"/>
+      </a:accent4>
+      <a:accent5>
+        <a:srgbClr val="5B9BD5"/>
+      </a:accent5>
+      <a:accent6>
+        <a:srgbClr val="70AD47"/>
+      </a:accent6>
+      <a:hlink>
+        <a:srgbClr val="0563C1"/>
+      </a:hlink>
+      <a:folHlink>
+        <a:srgbClr val="954F72"/>
+      </a:folHlink>
+    </a:clrScheme>
+    <a:fontScheme name="Office">
+      <a:majorFont>
+        <a:latin typeface="Calibri Light"/>
+        <a:ea typeface=""/>
+        <a:cs typeface=""/>
+        <a:font script="Jpan" typeface="游ゴシック Light"/>
+        <a:font script="Hang" typeface="맑은 고딕"/>
+        <a:font script="Hans" typeface="等线 Light"/>
+        <a:font script="Hant" typeface="新細明體"/>
+        <a:font script="Arab" typeface="Times New Roman"/>
+        <a:font script="Hebr" typeface="Times New Roman"/>
+        <a:font script="Thai" typeface="Angsana New"/>
+        <a:font script="Ethi" typeface="Nyala"/>
+        <a:font script="Beng" typeface="Vrinda"/>
+        <a:font script="Gujr" typeface="Shruti"/>
+        <a:font script="Khmr" typeface="MoolBoran"/>
+        <a:font script="Knda" typeface="Tunga"/>
+        <a:font script="Guru" typeface="Raavi"/>
+        <a:font script="Cans" typeface="Euphemia"/>
+        <a:font script="Cher" typeface="Plantagenet Cherokee"/>
+        <a:font script="Yiii" typeface="Microsoft Yi Baiti"/>
+        <a:font script="Tibt" typeface="Microsoft Himalaya"/>
+        <a:font script="Thaa" typeface="MV Boli"/>
+        <a:font script="Deva" typeface="Mangal"/>
+        <a:font script="Telu" typeface="Gautami"/>
+        <a:font script="Taml" typeface="Latha"/>
+        <a:font script="Syrc" typeface="Estrangelo Edessa"/>
+        <a:font script="Orya" typeface="Kalinga"/>
+        <a:font script="Mlym" typeface="Kartika"/>
+        <a:font script="Laoo" typeface="DokChampa"/>
+        <a:font script="Sinh" typeface="Iskoola Pota"/>
+        <a:font script="Mong" typeface="Mongolian Baiti"/>
+        <a:font script="Viet" typeface="Times New Roman"/>
+        <a:font script="Uigh" typeface="Microsoft Uighur"/>
+        <a:font script="Geor" typeface="Sylfaen"/>
+      </a:majorFont>
+      <a:minorFont>
+        <a:latin typeface="Calibri"/>
+        <a:ea typeface=""/>
+        <a:cs typeface=""/>
+        <a:font script="Jpan" typeface="游ゴシック"/>
+        <a:font script="Hang" typeface="맑은 고딕"/>
+        <a:font script="Hans" typeface="等线"/>
+        <a:font script="Hant" typeface="新細明體"/>
+        <a:font script="Arab" typeface="Arial"/>
+        <a:font script="Hebr" typeface="Arial"/>
+        <a:font script="Thai" typeface="Cordia New"/>
+        <a:font script="Ethi" typeface="Nyala"/>
+        <a:font script="Beng" typeface="Vrinda"/>
+        <a:font script="Gujr" typeface="Shruti"/>
+        <a:font script="Khmr" typeface="DaunPenh"/>
+        <a:font script="Knda" typeface="Tunga"/>
+        <a:font script="Guru" typeface="Raavi"/>
+        <a:font script="Cans" typeface="Euphemia"/>
+        <a:font script="Cher" typeface="Plantagenet Cherokee"/>
+        <a:font script="Yiii" typeface="Microsoft Yi Baiti"/>
+        <a:font script="Tibt" typeface="Microsoft Himalaya"/>
+        <a:font script="Thaa" typeface="MV Boli"/>
+        <a:font script="Deva" typeface="Mangal"/>
+        <a:font script="Telu" typeface="Gautami"/>
+        <a:font script="Taml" typeface="Latha"/>
+        <a:font script="Syrc" typeface="Estrangelo Edessa"/>
+        <a:font script="Orya" typeface="Kalinga"/>
+        <a:font script="Mlym" typeface="Kartika"/>
+        <a:font script="Laoo" typeface="DokChampa"/>
+        <a:font script="Sinh" typeface="Iskoola Pota"/>
+        <a:font script="Mong" typeface="Mongolian Baiti"/>
+        <a:font script="Viet" typeface="Arial"/>
+        <a:font script="Uigh" typeface="Microsoft Uighur"/>
+        <a:font script="Geor" typeface="Sylfaen"/>
+      </a:minorFont>
+    </a:fontScheme>
+    <a:fmtScheme name="Office">
+      <a:fillStyleLst>
+        <a:solidFill>
+          <a:schemeClr val="phClr"/>
+        </a:solidFill>
+        <a:gradFill rotWithShape="1">
+          <a:gsLst>
+            <a:gs pos="0">
+              <a:schemeClr val="phClr">
+                <a:lumMod val="110000"/>
+                <a:satMod val="105000"/>
+                <a:tint val="67000"/>
+              </a:schemeClr>
+            </a:gs>
+            <a:gs pos="50000">
+              <a:schemeClr val="phClr">
+                <a:lumMod val="105000"/>
+                <a:satMod val="103000"/>
+                <a:tint val="73000"/>
+              </a:schemeClr>
+            </a:gs>
+            <a:gs pos="100000">
+              <a:schemeClr val="phClr">
+                <a:lumMod val="105000"/>
+                <a:satMod val="109000"/>
+                <a:tint val="81000"/>
+              </a:schemeClr>
+            </a:gs>
+          </a:gsLst>
+          <a:lin ang="5400000" scaled="0"/>
+        </a:gradFill>
+        <a:gradFill rotWithShape="1">
+          <a:gsLst>
+            <a:gs pos="0">
+              <a:schemeClr val="phClr">
+                <a:satMod val="103000"/>
+                <a:lumMod val="102000"/>
+                <a:tint val="94000"/>
+              </a:schemeClr>
+            </a:gs>
+            <a:gs pos="50000">
+              <a:schemeClr val="phClr">
+                <a:satMod val="110000"/>
+                <a:lumMod val="100000"/>
+                <a:shade val="100000"/>
+              </a:schemeClr>
+            </a:gs>
+            <a:gs pos="100000">
+              <a:schemeClr val="phClr">
+                <a:lumMod val="99000"/>
+                <a:satMod val="120000"/>
+                <a:shade val="78000"/>
+              </a:schemeClr>
+            </a:gs>
+          </a:gsLst>
+          <a:lin ang="5400000" scaled="0"/>
+        </a:gradFill>
+      </a:fillStyleLst>
+      <a:lnStyleLst>
+        <a:ln w="6350" cap="flat" cmpd="sng" algn="ctr">
+          <a:solidFill>
+            <a:schemeClr val="phClr"/>
+          </a:solidFill>
+          <a:prstDash val="solid"/>
+          <a:miter lim="800000"/>
+        </a:ln>
+        <a:ln w="12700" cap="flat" cmpd="sng" algn="ctr">
+          <a:solidFill>
+            <a:schemeClr val="phClr"/>
+          </a:solidFill>
+          <a:prstDash val="solid"/>
+          <a:miter lim="800000"/>
+        </a:ln>
+        <a:ln w="19050" cap="flat" cmpd="sng" algn="ctr">
+          <a:solidFill>
+            <a:schemeClr val="phClr"/>
+          </a:solidFill>
+          <a:prstDash val="solid"/>
+          <a:miter lim="800000"/>
+        </a:ln>
+      </a:lnStyleLst>
+      <a:effectStyleLst>
+        <a:effectStyle>
+          <a:effectLst/>
+        </a:effectStyle>
+        <a:effectStyle>
+          <a:effectLst/>
+        </a:effectStyle>
+        <a:effectStyle>
+          <a:effectLst>
+            <a:outerShdw blurRad="57150" dist="19050" dir="5400000" algn="ctr" rotWithShape="0">
+              <a:srgbClr val="000000">
+                <a:alpha val="63000"/>
+              </a:srgbClr>
+            </a:outerShdw>
+          </a:effectLst>
+        </a:effectStyle>
+      </a:effectStyleLst>
+      <a:bgFillStyleLst>
+        <a:solidFill>
+          <a:schemeClr val="phClr"/>
+        </a:solidFill>
+        <a:solidFill>
+          <a:schemeClr val="phClr">
+            <a:tint val="95000"/>
+            <a:satMod val="170000"/>
+          </a:schemeClr>
+        </a:solidFill>
+        <a:gradFill rotWithShape="1">
+          <a:gsLst>
+            <a:gs pos="0">
+              <a:schemeClr val="phClr">
+                <a:tint val="93000"/>
+                <a:satMod val="150000"/>
+                <a:shade val="98000"/>
+                <a:lumMod val="102000"/>
+              </a:schemeClr>
+            </a:gs>
+            <a:gs pos="50000">
+              <a:schemeClr val="phClr">
+                <a:tint val="98000"/>
+                <a:satMod val="130000"/>
+                <a:shade val="90000"/>
+                <a:lumMod val="103000"/>
+              </a:schemeClr>
+            </a:gs>
+            <a:gs pos="100000">
+              <a:schemeClr val="phClr">
+                <a:shade val="63000"/>
+                <a:satMod val="120000"/>
+              </a:schemeClr>
+            </a:gs>
+          </a:gsLst>
+          <a:lin ang="5400000" scaled="0"/>
+        </a:gradFill>
+      </a:bgFillStyleLst>
+    </a:fmtScheme>
+  </a:themeElements>
   <a:extLst>
     <a:ext uri="{05A4C25C-085E-4340-85A3-A5531E510DB2}">
       <thm15:themeFamily xmlns:thm15="http://schemas.microsoft.com/office/thememl/2012/main" name="Office Theme" id="{62F939B6-93AF-4DB8-9C6B-D6C7DFDC589F}" vid="{4A3C46E8-61CC-4603-A589-7422A47A8E4A}"/>
